--- a/Shoplifting Detection.pptx
+++ b/Shoplifting Detection.pptx
@@ -5,7 +5,7 @@
     <p:sldMasterId id="2147483672" r:id="rId1"/>
   </p:sldMasterIdLst>
   <p:notesMasterIdLst>
-    <p:notesMasterId r:id="rId16"/>
+    <p:notesMasterId r:id="rId17"/>
   </p:notesMasterIdLst>
   <p:sldIdLst>
     <p:sldId id="369" r:id="rId2"/>
@@ -19,9 +19,10 @@
     <p:sldId id="278" r:id="rId10"/>
     <p:sldId id="334" r:id="rId11"/>
     <p:sldId id="299" r:id="rId12"/>
-    <p:sldId id="304" r:id="rId13"/>
-    <p:sldId id="315" r:id="rId14"/>
-    <p:sldId id="367" r:id="rId15"/>
+    <p:sldId id="273" r:id="rId13"/>
+    <p:sldId id="304" r:id="rId14"/>
+    <p:sldId id="315" r:id="rId15"/>
+    <p:sldId id="367" r:id="rId16"/>
   </p:sldIdLst>
   <p:sldSz cx="9144000" cy="6858000" type="screen4x3"/>
   <p:notesSz cx="6858000" cy="9144000"/>
@@ -302,7 +303,7 @@
                 <a:buNone/>
                 <a:defRPr/>
               </a:pPr>
-              <a:t>3/8/25</a:t>
+              <a:t>3/21/25</a:t>
             </a:fld>
             <a:endParaRPr kumimoji="0" lang="en-US" sz="1200" b="0" i="0" u="none" strike="noStrike" kern="1200" cap="none" spc="0" normalizeH="0" baseline="0" noProof="0">
               <a:ln>
@@ -1749,7 +1750,7 @@
                   <a:spcPct val="0"/>
                 </a:spcBef>
               </a:pPr>
-              <a:t>12</a:t>
+              <a:t>13</a:t>
             </a:fld>
             <a:endParaRPr lang="en-US" altLang="en-US" dirty="0">
               <a:latin typeface="Arial" panose="020B0604020202020204" pitchFamily="34" charset="0"/>
@@ -7366,6 +7367,388 @@
           <a:chExt cx="0" cy="0"/>
         </a:xfrm>
       </p:grpSpPr>
+      <p:grpSp>
+        <p:nvGrpSpPr>
+          <p:cNvPr id="2" name="object 2"/>
+          <p:cNvGrpSpPr/>
+          <p:nvPr/>
+        </p:nvGrpSpPr>
+        <p:grpSpPr>
+          <a:xfrm>
+            <a:off x="-6025" y="1259375"/>
+            <a:ext cx="9020175" cy="5605145"/>
+            <a:chOff x="-6025" y="1259375"/>
+            <a:chExt cx="9020175" cy="5605145"/>
+          </a:xfrm>
+        </p:grpSpPr>
+        <p:pic>
+          <p:nvPicPr>
+            <p:cNvPr id="3" name="object 3"/>
+            <p:cNvPicPr/>
+            <p:nvPr/>
+          </p:nvPicPr>
+          <p:blipFill>
+            <a:blip r:embed="rId2" cstate="print"/>
+            <a:stretch>
+              <a:fillRect/>
+            </a:stretch>
+          </p:blipFill>
+          <p:spPr>
+            <a:xfrm>
+              <a:off x="70374" y="1259375"/>
+              <a:ext cx="4722299" cy="5264499"/>
+            </a:xfrm>
+            <a:prstGeom prst="rect">
+              <a:avLst/>
+            </a:prstGeom>
+          </p:spPr>
+        </p:pic>
+        <p:pic>
+          <p:nvPicPr>
+            <p:cNvPr id="4" name="object 4"/>
+            <p:cNvPicPr/>
+            <p:nvPr/>
+          </p:nvPicPr>
+          <p:blipFill>
+            <a:blip r:embed="rId3" cstate="print"/>
+            <a:stretch>
+              <a:fillRect/>
+            </a:stretch>
+          </p:blipFill>
+          <p:spPr>
+            <a:xfrm>
+              <a:off x="4885125" y="1259375"/>
+              <a:ext cx="4128599" cy="5264501"/>
+            </a:xfrm>
+            <a:prstGeom prst="rect">
+              <a:avLst/>
+            </a:prstGeom>
+          </p:spPr>
+        </p:pic>
+      </p:grpSp>
+      <p:sp>
+        <p:nvSpPr>
+          <p:cNvPr id="5" name="object 5"/>
+          <p:cNvSpPr txBox="1">
+            <a:spLocks noGrp="1"/>
+          </p:cNvSpPr>
+          <p:nvPr>
+            <p:ph type="title"/>
+          </p:nvPr>
+        </p:nvSpPr>
+        <p:spPr>
+          <a:xfrm>
+            <a:off x="336335" y="-62173"/>
+            <a:ext cx="7886700" cy="992709"/>
+          </a:xfrm>
+          <a:prstGeom prst="rect">
+            <a:avLst/>
+          </a:prstGeom>
+        </p:spPr>
+        <p:txBody>
+          <a:bodyPr vert="horz" wrap="square" lIns="0" tIns="358268" rIns="0" bIns="0" rtlCol="0">
+            <a:spAutoFit/>
+          </a:bodyPr>
+          <a:lstStyle/>
+          <a:p>
+            <a:pPr marL="1617345">
+              <a:lnSpc>
+                <a:spcPct val="100000"/>
+              </a:lnSpc>
+              <a:spcBef>
+                <a:spcPts val="100"/>
+              </a:spcBef>
+            </a:pPr>
+            <a:r>
+              <a:rPr lang="en-US" sz="4100" u="heavy" spc="335" dirty="0">
+                <a:uFill>
+                  <a:solidFill>
+                    <a:srgbClr val="464646"/>
+                  </a:solidFill>
+                </a:uFill>
+                <a:latin typeface="Trebuchet MS"/>
+                <a:cs typeface="Trebuchet MS"/>
+              </a:rPr>
+              <a:t>Code </a:t>
+            </a:r>
+            <a:endParaRPr sz="4100" dirty="0">
+              <a:latin typeface="Trebuchet MS"/>
+              <a:cs typeface="Trebuchet MS"/>
+            </a:endParaRPr>
+          </a:p>
+        </p:txBody>
+      </p:sp>
+      <p:sp>
+        <p:nvSpPr>
+          <p:cNvPr id="6" name="object 6"/>
+          <p:cNvSpPr txBox="1">
+            <a:spLocks noGrp="1"/>
+          </p:cNvSpPr>
+          <p:nvPr>
+            <p:ph type="sldNum" sz="quarter" idx="7"/>
+          </p:nvPr>
+        </p:nvSpPr>
+        <p:spPr>
+          <a:xfrm>
+            <a:off x="8748680" y="6577588"/>
+            <a:ext cx="230617" cy="167664"/>
+          </a:xfrm>
+          <a:prstGeom prst="rect">
+            <a:avLst/>
+          </a:prstGeom>
+        </p:spPr>
+        <p:txBody>
+          <a:bodyPr vert="horz" wrap="square" lIns="0" tIns="0" rIns="0" bIns="0" rtlCol="0">
+            <a:spAutoFit/>
+          </a:bodyPr>
+          <a:lstStyle>
+            <a:defPPr>
+              <a:defRPr kern="0"/>
+            </a:defPPr>
+            <a:lvl1pPr>
+              <a:defRPr sz="1000" b="0" i="0">
+                <a:solidFill>
+                  <a:schemeClr val="tx1"/>
+                </a:solidFill>
+                <a:latin typeface="Arial MT"/>
+                <a:cs typeface="Arial MT"/>
+              </a:defRPr>
+            </a:lvl1pPr>
+          </a:lstStyle>
+          <a:p>
+            <a:pPr marL="38100">
+              <a:lnSpc>
+                <a:spcPct val="100000"/>
+              </a:lnSpc>
+              <a:spcBef>
+                <a:spcPts val="5"/>
+              </a:spcBef>
+            </a:pPr>
+            <a:fld id="{81D60167-4931-47E6-BA6A-407CBD079E47}" type="slidenum">
+              <a:rPr lang="en-IN" spc="-25" smtClean="0"/>
+              <a:pPr marL="38100">
+                <a:lnSpc>
+                  <a:spcPct val="100000"/>
+                </a:lnSpc>
+                <a:spcBef>
+                  <a:spcPts val="5"/>
+                </a:spcBef>
+              </a:pPr>
+              <a:t>12</a:t>
+            </a:fld>
+            <a:endParaRPr spc="-25" dirty="0"/>
+          </a:p>
+        </p:txBody>
+      </p:sp>
+      <p:sp>
+        <p:nvSpPr>
+          <p:cNvPr id="7" name="object 7"/>
+          <p:cNvSpPr txBox="1"/>
+          <p:nvPr/>
+        </p:nvSpPr>
+        <p:spPr>
+          <a:xfrm>
+            <a:off x="318750" y="6595864"/>
+            <a:ext cx="1450340" cy="205104"/>
+          </a:xfrm>
+          <a:prstGeom prst="rect">
+            <a:avLst/>
+          </a:prstGeom>
+        </p:spPr>
+        <p:txBody>
+          <a:bodyPr vert="horz" wrap="square" lIns="0" tIns="7620" rIns="0" bIns="0" rtlCol="0">
+            <a:spAutoFit/>
+          </a:bodyPr>
+          <a:lstStyle/>
+          <a:p>
+            <a:pPr marL="12700">
+              <a:lnSpc>
+                <a:spcPct val="100000"/>
+              </a:lnSpc>
+              <a:spcBef>
+                <a:spcPts val="60"/>
+              </a:spcBef>
+            </a:pPr>
+            <a:r>
+              <a:rPr sz="1200" dirty="0">
+                <a:latin typeface="Lucida Sans Unicode"/>
+                <a:cs typeface="Lucida Sans Unicode"/>
+              </a:rPr>
+              <a:t>FIG</a:t>
+            </a:r>
+            <a:r>
+              <a:rPr sz="1200" spc="-20" dirty="0">
+                <a:latin typeface="Lucida Sans Unicode"/>
+                <a:cs typeface="Lucida Sans Unicode"/>
+              </a:rPr>
+              <a:t> </a:t>
+            </a:r>
+            <a:r>
+              <a:rPr sz="1200" dirty="0">
+                <a:latin typeface="Lucida Sans Unicode"/>
+                <a:cs typeface="Lucida Sans Unicode"/>
+              </a:rPr>
+              <a:t>9:</a:t>
+            </a:r>
+            <a:r>
+              <a:rPr sz="1200" spc="-20" dirty="0">
+                <a:latin typeface="Lucida Sans Unicode"/>
+                <a:cs typeface="Lucida Sans Unicode"/>
+              </a:rPr>
+              <a:t> </a:t>
+            </a:r>
+            <a:r>
+              <a:rPr sz="1200" dirty="0">
+                <a:latin typeface="Lucida Sans Unicode"/>
+                <a:cs typeface="Lucida Sans Unicode"/>
+              </a:rPr>
+              <a:t>App.py</a:t>
+            </a:r>
+            <a:r>
+              <a:rPr sz="1200" spc="-15" dirty="0">
+                <a:latin typeface="Lucida Sans Unicode"/>
+                <a:cs typeface="Lucida Sans Unicode"/>
+              </a:rPr>
+              <a:t> </a:t>
+            </a:r>
+            <a:r>
+              <a:rPr sz="1200" spc="-20" dirty="0">
+                <a:latin typeface="Lucida Sans Unicode"/>
+                <a:cs typeface="Lucida Sans Unicode"/>
+              </a:rPr>
+              <a:t>Code</a:t>
+            </a:r>
+            <a:endParaRPr sz="1200">
+              <a:latin typeface="Lucida Sans Unicode"/>
+              <a:cs typeface="Lucida Sans Unicode"/>
+            </a:endParaRPr>
+          </a:p>
+        </p:txBody>
+      </p:sp>
+      <p:sp>
+        <p:nvSpPr>
+          <p:cNvPr id="8" name="object 8"/>
+          <p:cNvSpPr txBox="1"/>
+          <p:nvPr/>
+        </p:nvSpPr>
+        <p:spPr>
+          <a:xfrm>
+            <a:off x="5430449" y="6595864"/>
+            <a:ext cx="2113280" cy="205104"/>
+          </a:xfrm>
+          <a:prstGeom prst="rect">
+            <a:avLst/>
+          </a:prstGeom>
+        </p:spPr>
+        <p:txBody>
+          <a:bodyPr vert="horz" wrap="square" lIns="0" tIns="7620" rIns="0" bIns="0" rtlCol="0">
+            <a:spAutoFit/>
+          </a:bodyPr>
+          <a:lstStyle/>
+          <a:p>
+            <a:pPr marL="12700">
+              <a:lnSpc>
+                <a:spcPct val="100000"/>
+              </a:lnSpc>
+              <a:spcBef>
+                <a:spcPts val="60"/>
+              </a:spcBef>
+            </a:pPr>
+            <a:r>
+              <a:rPr sz="1200" dirty="0">
+                <a:latin typeface="Lucida Sans Unicode"/>
+                <a:cs typeface="Lucida Sans Unicode"/>
+              </a:rPr>
+              <a:t>FIG</a:t>
+            </a:r>
+            <a:r>
+              <a:rPr sz="1200" spc="-25" dirty="0">
+                <a:latin typeface="Lucida Sans Unicode"/>
+                <a:cs typeface="Lucida Sans Unicode"/>
+              </a:rPr>
+              <a:t> </a:t>
+            </a:r>
+            <a:r>
+              <a:rPr sz="1200" dirty="0">
+                <a:latin typeface="Lucida Sans Unicode"/>
+                <a:cs typeface="Lucida Sans Unicode"/>
+              </a:rPr>
+              <a:t>10:</a:t>
+            </a:r>
+            <a:r>
+              <a:rPr sz="1200" spc="-25" dirty="0">
+                <a:latin typeface="Lucida Sans Unicode"/>
+                <a:cs typeface="Lucida Sans Unicode"/>
+              </a:rPr>
+              <a:t> </a:t>
+            </a:r>
+            <a:r>
+              <a:rPr sz="1200" dirty="0">
+                <a:latin typeface="Lucida Sans Unicode"/>
+                <a:cs typeface="Lucida Sans Unicode"/>
+              </a:rPr>
+              <a:t>App.py</a:t>
+            </a:r>
+            <a:r>
+              <a:rPr sz="1200" spc="-25" dirty="0">
+                <a:latin typeface="Lucida Sans Unicode"/>
+                <a:cs typeface="Lucida Sans Unicode"/>
+              </a:rPr>
+              <a:t> </a:t>
+            </a:r>
+            <a:r>
+              <a:rPr sz="1200" dirty="0">
+                <a:latin typeface="Lucida Sans Unicode"/>
+                <a:cs typeface="Lucida Sans Unicode"/>
+              </a:rPr>
+              <a:t>Code</a:t>
+            </a:r>
+            <a:r>
+              <a:rPr sz="1200" spc="-25" dirty="0">
+                <a:latin typeface="Lucida Sans Unicode"/>
+                <a:cs typeface="Lucida Sans Unicode"/>
+              </a:rPr>
+              <a:t> </a:t>
+            </a:r>
+            <a:r>
+              <a:rPr sz="1200" spc="-10" dirty="0">
+                <a:latin typeface="Lucida Sans Unicode"/>
+                <a:cs typeface="Lucida Sans Unicode"/>
+              </a:rPr>
+              <a:t>(cont..)</a:t>
+            </a:r>
+            <a:endParaRPr sz="1200">
+              <a:latin typeface="Lucida Sans Unicode"/>
+              <a:cs typeface="Lucida Sans Unicode"/>
+            </a:endParaRPr>
+          </a:p>
+        </p:txBody>
+      </p:sp>
+    </p:spTree>
+  </p:cSld>
+  <p:clrMapOvr>
+    <a:masterClrMapping/>
+  </p:clrMapOvr>
+</p:sld>
+</file>
+
+<file path=ppt/slides/slide13.xml><?xml version="1.0" encoding="utf-8"?>
+<p:sld xmlns:a="http://schemas.openxmlformats.org/drawingml/2006/main" xmlns:r="http://schemas.openxmlformats.org/officeDocument/2006/relationships" xmlns:p="http://schemas.openxmlformats.org/presentationml/2006/main">
+  <p:cSld>
+    <p:spTree>
+      <p:nvGrpSpPr>
+        <p:cNvPr id="1" name=""/>
+        <p:cNvGrpSpPr/>
+        <p:nvPr/>
+      </p:nvGrpSpPr>
+      <p:grpSpPr>
+        <a:xfrm>
+          <a:off x="0" y="0"/>
+          <a:ext cx="0" cy="0"/>
+          <a:chOff x="0" y="0"/>
+          <a:chExt cx="0" cy="0"/>
+        </a:xfrm>
+      </p:grpSpPr>
       <p:sp>
         <p:nvSpPr>
           <p:cNvPr id="18434" name="Title 1"/>
@@ -7610,7 +7993,7 @@
                 <a:buFontTx/>
                 <a:buNone/>
               </a:pPr>
-              <a:t>12</a:t>
+              <a:t>13</a:t>
             </a:fld>
             <a:endParaRPr lang="en-US" altLang="en-US" sz="1000" dirty="0">
               <a:latin typeface="Arial" panose="020B0604020202020204" pitchFamily="34" charset="0"/>
@@ -7626,7 +8009,7 @@
 </p:sld>
 </file>
 
-<file path=ppt/slides/slide13.xml><?xml version="1.0" encoding="utf-8"?>
+<file path=ppt/slides/slide14.xml><?xml version="1.0" encoding="utf-8"?>
 <p:sld xmlns:a="http://schemas.openxmlformats.org/drawingml/2006/main" xmlns:r="http://schemas.openxmlformats.org/officeDocument/2006/relationships" xmlns:p="http://schemas.openxmlformats.org/presentationml/2006/main">
   <p:cSld>
     <p:spTree>
@@ -8012,7 +8395,7 @@
                 <a:buFontTx/>
                 <a:buNone/>
               </a:pPr>
-              <a:t>13</a:t>
+              <a:t>14</a:t>
             </a:fld>
             <a:endParaRPr lang="en-US" altLang="en-US" sz="1000" dirty="0">
               <a:latin typeface="Arial" panose="020B0604020202020204" pitchFamily="34" charset="0"/>
@@ -8028,7 +8411,7 @@
 </p:sld>
 </file>
 
-<file path=ppt/slides/slide14.xml><?xml version="1.0" encoding="utf-8"?>
+<file path=ppt/slides/slide15.xml><?xml version="1.0" encoding="utf-8"?>
 <p:sld xmlns:a="http://schemas.openxmlformats.org/drawingml/2006/main" xmlns:r="http://schemas.openxmlformats.org/officeDocument/2006/relationships" xmlns:p="http://schemas.openxmlformats.org/presentationml/2006/main">
   <p:cSld>
     <p:spTree>
